--- a/slides/pptx/week13.pptx
+++ b/slides/pptx/week13.pptx
@@ -2369,7 +2369,7 @@
                 <a:ea typeface="Calibri" pitchFamily="34" charset="-122"/>
                 <a:cs typeface="Calibri" pitchFamily="34" charset="-120"/>
               </a:rPr>
-              <a:t>Over-permissive IAM (*:*) → least privilege</a:t>
+              <a:t>Over-permissive IAM (:) → least privilege</a:t>
             </a:r>
             <a:endParaRPr lang="en-US" sz="1350" dirty="0"/>
           </a:p>
@@ -4466,7 +4466,7 @@
                 <a:ea typeface="Calibri" pitchFamily="34" charset="-122"/>
                 <a:cs typeface="Calibri" pitchFamily="34" charset="-120"/>
               </a:rPr>
-              <a:t>Cloud secures *of* the cloud; you secure *in* the cloud</a:t>
+              <a:t>Cloud secures of the cloud; you secure in the cloud</a:t>
             </a:r>
             <a:endParaRPr lang="en-US" sz="1400" dirty="0"/>
           </a:p>

--- a/slides/pptx/week13.pptx
+++ b/slides/pptx/week13.pptx
@@ -1925,7 +1925,7 @@
     <p:bg>
       <p:bgPr>
         <a:solidFill>
-          <a:srgbClr val="0E1726"/>
+          <a:srgbClr val="FFFFFF"/>
         </a:solidFill>
       </p:bgPr>
     </p:bg>
@@ -1943,38 +1943,9 @@
           <a:chExt cx="0" cy="0"/>
         </a:xfrm>
       </p:grpSpPr>
-      <p:sp>
-        <p:nvSpPr>
-          <p:cNvPr id="2" name="Shape 0"/>
-          <p:cNvSpPr/>
-          <p:nvPr/>
-        </p:nvSpPr>
-        <p:spPr>
-          <a:xfrm>
-            <a:off x="603504" y="411480"/>
-            <a:ext cx="1874520" cy="932688"/>
-          </a:xfrm>
-          <a:prstGeom prst="roundRect">
-            <a:avLst>
-              <a:gd name="adj" fmla="val 7843"/>
-            </a:avLst>
-          </a:prstGeom>
-          <a:solidFill>
-            <a:srgbClr val="FFFFFF"/>
-          </a:solidFill>
-          <a:ln/>
-          <a:effectLst>
-            <a:outerShdw sx="100000" sy="100000" kx="0" ky="0" algn="bl" rotWithShape="0" blurRad="101600" dist="38100" dir="5400000">
-              <a:srgbClr val="000000">
-                <a:alpha val="35000"/>
-              </a:srgbClr>
-            </a:outerShdw>
-          </a:effectLst>
-        </p:spPr>
-      </p:sp>
       <p:pic>
         <p:nvPicPr>
-          <p:cNvPr id="3" name="Image 0" descr="/Users/pop7/Library/CloudStorage/OneDrive-MonsterConnectCo.,Ltd/Lecture/KOSEN69 - software-security/slides/pptx/assets/logo-small.png">    </p:cNvPr>
+          <p:cNvPr id="2" name="Image 0" descr="/Users/pop7/Library/CloudStorage/OneDrive-MonsterConnectCo.,Ltd/Lecture/KOSEN69 - software-security/slides/pptx/assets/logo-small.png">    </p:cNvPr>
           <p:cNvPicPr>
             <a:picLocks noChangeAspect="1"/>
           </p:cNvPicPr>
@@ -1988,8 +1959,8 @@
         </p:blipFill>
         <p:spPr>
           <a:xfrm>
-            <a:off x="758952" y="566928"/>
-            <a:ext cx="1563624" cy="621792"/>
+            <a:off x="640080" y="502920"/>
+            <a:ext cx="1691640" cy="676656"/>
           </a:xfrm>
           <a:prstGeom prst="rect">
             <a:avLst/>
@@ -1998,7 +1969,7 @@
       </p:pic>
       <p:sp>
         <p:nvSpPr>
-          <p:cNvPr id="4" name="Text 1"/>
+          <p:cNvPr id="3" name="Text 0"/>
           <p:cNvSpPr/>
           <p:nvPr/>
         </p:nvSpPr>
@@ -2037,7 +2008,7 @@
       </p:sp>
       <p:sp>
         <p:nvSpPr>
-          <p:cNvPr id="5" name="Text 2"/>
+          <p:cNvPr id="4" name="Text 1"/>
           <p:cNvSpPr/>
           <p:nvPr/>
         </p:nvSpPr>
@@ -2065,7 +2036,7 @@
             <a:r>
               <a:rPr lang="en-US" sz="4000" b="1" dirty="0">
                 <a:solidFill>
-                  <a:srgbClr val="E6EDF3"/>
+                  <a:srgbClr val="1F2937"/>
                 </a:solidFill>
                 <a:latin typeface="Arial" pitchFamily="34" charset="0"/>
                 <a:ea typeface="Arial" pitchFamily="34" charset="-122"/>
@@ -2079,7 +2050,7 @@
       </p:sp>
       <p:sp>
         <p:nvSpPr>
-          <p:cNvPr id="6" name="Text 3"/>
+          <p:cNvPr id="5" name="Text 2"/>
           <p:cNvSpPr/>
           <p:nvPr/>
         </p:nvSpPr>
@@ -2104,7 +2075,7 @@
             <a:r>
               <a:rPr lang="en-US" sz="1400" dirty="0">
                 <a:solidFill>
-                  <a:srgbClr val="94A3B8"/>
+                  <a:srgbClr val="64748B"/>
                 </a:solidFill>
                 <a:latin typeface="Calibri" pitchFamily="34" charset="0"/>
                 <a:ea typeface="Calibri" pitchFamily="34" charset="-122"/>
@@ -2130,7 +2101,7 @@
     <p:bg>
       <p:bgPr>
         <a:solidFill>
-          <a:srgbClr val="0E1726"/>
+          <a:srgbClr val="FFFFFF"/>
         </a:solidFill>
       </p:bgPr>
     </p:bg>
@@ -2167,9 +2138,9 @@
           </a:solidFill>
           <a:ln/>
           <a:effectLst>
-            <a:outerShdw sx="100000" sy="100000" kx="0" ky="0" algn="bl" rotWithShape="0" blurRad="101600" dist="38100" dir="5400000">
+            <a:outerShdw sx="100000" sy="100000" kx="0" ky="0" algn="bl" rotWithShape="0" blurRad="76200" dist="25400" dir="5400000">
               <a:srgbClr val="000000">
-                <a:alpha val="35000"/>
+                <a:alpha val="12000"/>
               </a:srgbClr>
             </a:outerShdw>
           </a:effectLst>
@@ -2226,7 +2197,7 @@
             <a:r>
               <a:rPr lang="en-US" sz="2600" b="1" dirty="0">
                 <a:solidFill>
-                  <a:srgbClr val="E6EDF3"/>
+                  <a:srgbClr val="1F2937"/>
                 </a:solidFill>
                 <a:latin typeface="Arial" pitchFamily="34" charset="0"/>
                 <a:ea typeface="Arial" pitchFamily="34" charset="-122"/>
@@ -2265,7 +2236,7 @@
             <a:r>
               <a:rPr lang="en-US" sz="1400" dirty="0">
                 <a:solidFill>
-                  <a:srgbClr val="E6EDF3"/>
+                  <a:srgbClr val="1F2937"/>
                 </a:solidFill>
                 <a:latin typeface="Calibri" pitchFamily="34" charset="0"/>
                 <a:ea typeface="Calibri" pitchFamily="34" charset="-122"/>
@@ -2363,7 +2334,7 @@
             <a:r>
               <a:rPr lang="en-US" sz="1350" dirty="0">
                 <a:solidFill>
-                  <a:srgbClr val="E6EDF3"/>
+                  <a:srgbClr val="1F2937"/>
                 </a:solidFill>
                 <a:latin typeface="Calibri" pitchFamily="34" charset="0"/>
                 <a:ea typeface="Calibri" pitchFamily="34" charset="-122"/>
@@ -2461,7 +2432,7 @@
             <a:r>
               <a:rPr lang="en-US" sz="1350" dirty="0">
                 <a:solidFill>
-                  <a:srgbClr val="E6EDF3"/>
+                  <a:srgbClr val="1F2937"/>
                 </a:solidFill>
                 <a:latin typeface="Calibri" pitchFamily="34" charset="0"/>
                 <a:ea typeface="Calibri" pitchFamily="34" charset="-122"/>
@@ -2559,7 +2530,7 @@
             <a:r>
               <a:rPr lang="en-US" sz="1350" dirty="0">
                 <a:solidFill>
-                  <a:srgbClr val="E6EDF3"/>
+                  <a:srgbClr val="1F2937"/>
                 </a:solidFill>
                 <a:latin typeface="Calibri" pitchFamily="34" charset="0"/>
                 <a:ea typeface="Calibri" pitchFamily="34" charset="-122"/>
@@ -2657,7 +2628,7 @@
             <a:r>
               <a:rPr lang="en-US" sz="1350" dirty="0">
                 <a:solidFill>
-                  <a:srgbClr val="E6EDF3"/>
+                  <a:srgbClr val="1F2937"/>
                 </a:solidFill>
                 <a:latin typeface="Calibri" pitchFamily="34" charset="0"/>
                 <a:ea typeface="Calibri" pitchFamily="34" charset="-122"/>
@@ -2696,7 +2667,7 @@
             <a:r>
               <a:rPr lang="en-US" sz="900" dirty="0">
                 <a:solidFill>
-                  <a:srgbClr val="94A3B8"/>
+                  <a:srgbClr val="64748B"/>
                 </a:solidFill>
                 <a:latin typeface="Calibri" pitchFamily="34" charset="0"/>
                 <a:ea typeface="Calibri" pitchFamily="34" charset="-122"/>
@@ -2708,38 +2679,9 @@
           </a:p>
         </p:txBody>
       </p:sp>
-      <p:sp>
-        <p:nvSpPr>
-          <p:cNvPr id="19" name="Shape 16"/>
-          <p:cNvSpPr/>
-          <p:nvPr/>
-        </p:nvSpPr>
-        <p:spPr>
-          <a:xfrm>
-            <a:off x="7772400" y="4590288"/>
-            <a:ext cx="969264" cy="475488"/>
-          </a:xfrm>
-          <a:prstGeom prst="roundRect">
-            <a:avLst>
-              <a:gd name="adj" fmla="val 11538"/>
-            </a:avLst>
-          </a:prstGeom>
-          <a:solidFill>
-            <a:srgbClr val="FFFFFF"/>
-          </a:solidFill>
-          <a:ln/>
-          <a:effectLst>
-            <a:outerShdw sx="100000" sy="100000" kx="0" ky="0" algn="bl" rotWithShape="0" blurRad="101600" dist="38100" dir="5400000">
-              <a:srgbClr val="000000">
-                <a:alpha val="35000"/>
-              </a:srgbClr>
-            </a:outerShdw>
-          </a:effectLst>
-        </p:spPr>
-      </p:sp>
       <p:pic>
         <p:nvPicPr>
-          <p:cNvPr id="20" name="Image 1" descr="/Users/pop7/Library/CloudStorage/OneDrive-MonsterConnectCo.,Ltd/Lecture/KOSEN69 - software-security/slides/pptx/assets/logo-small.png">    </p:cNvPr>
+          <p:cNvPr id="19" name="Image 1" descr="/Users/pop7/Library/CloudStorage/OneDrive-MonsterConnectCo.,Ltd/Lecture/KOSEN69 - software-security/slides/pptx/assets/logo-small.png">    </p:cNvPr>
           <p:cNvPicPr>
             <a:picLocks noChangeAspect="1"/>
           </p:cNvPicPr>
@@ -2753,7 +2695,7 @@
         </p:blipFill>
         <p:spPr>
           <a:xfrm>
-            <a:off x="7872984" y="4681728"/>
+            <a:off x="7882128" y="4700016"/>
             <a:ext cx="768096" cy="356616"/>
           </a:xfrm>
           <a:prstGeom prst="rect">
@@ -2775,7 +2717,7 @@
     <p:bg>
       <p:bgPr>
         <a:solidFill>
-          <a:srgbClr val="0E1726"/>
+          <a:srgbClr val="FFFFFF"/>
         </a:solidFill>
       </p:bgPr>
     </p:bg>
@@ -2812,9 +2754,9 @@
           </a:solidFill>
           <a:ln/>
           <a:effectLst>
-            <a:outerShdw sx="100000" sy="100000" kx="0" ky="0" algn="bl" rotWithShape="0" blurRad="101600" dist="38100" dir="5400000">
+            <a:outerShdw sx="100000" sy="100000" kx="0" ky="0" algn="bl" rotWithShape="0" blurRad="76200" dist="25400" dir="5400000">
               <a:srgbClr val="000000">
-                <a:alpha val="35000"/>
+                <a:alpha val="12000"/>
               </a:srgbClr>
             </a:outerShdw>
           </a:effectLst>
@@ -2871,7 +2813,7 @@
             <a:r>
               <a:rPr lang="en-US" sz="2600" b="1" dirty="0">
                 <a:solidFill>
-                  <a:srgbClr val="E6EDF3"/>
+                  <a:srgbClr val="1F2937"/>
                 </a:solidFill>
                 <a:latin typeface="Arial" pitchFamily="34" charset="0"/>
                 <a:ea typeface="Arial" pitchFamily="34" charset="-122"/>
@@ -2900,13 +2842,13 @@
             </a:avLst>
           </a:prstGeom>
           <a:solidFill>
-            <a:srgbClr val="18243A"/>
+            <a:srgbClr val="F1F5F9"/>
           </a:solidFill>
           <a:ln/>
           <a:effectLst>
-            <a:outerShdw sx="100000" sy="100000" kx="0" ky="0" algn="bl" rotWithShape="0" blurRad="101600" dist="38100" dir="5400000">
+            <a:outerShdw sx="100000" sy="100000" kx="0" ky="0" algn="bl" rotWithShape="0" blurRad="76200" dist="25400" dir="5400000">
               <a:srgbClr val="000000">
-                <a:alpha val="35000"/>
+                <a:alpha val="12000"/>
               </a:srgbClr>
             </a:outerShdw>
           </a:effectLst>
@@ -2943,7 +2885,7 @@
             <a:r>
               <a:rPr lang="en-US" sz="1400" dirty="0">
                 <a:solidFill>
-                  <a:srgbClr val="E6EDF3"/>
+                  <a:srgbClr val="1F2937"/>
                 </a:solidFill>
                 <a:latin typeface="Calibri" pitchFamily="34" charset="0"/>
                 <a:ea typeface="Calibri" pitchFamily="34" charset="-122"/>
@@ -2964,7 +2906,7 @@
             <a:r>
               <a:rPr lang="en-US" sz="1400" dirty="0">
                 <a:solidFill>
-                  <a:srgbClr val="E6EDF3"/>
+                  <a:srgbClr val="1F2937"/>
                 </a:solidFill>
                 <a:latin typeface="Calibri" pitchFamily="34" charset="0"/>
                 <a:ea typeface="Calibri" pitchFamily="34" charset="-122"/>
@@ -2985,7 +2927,7 @@
             <a:r>
               <a:rPr lang="en-US" sz="1400" dirty="0">
                 <a:solidFill>
-                  <a:srgbClr val="E6EDF3"/>
+                  <a:srgbClr val="1F2937"/>
                 </a:solidFill>
                 <a:latin typeface="Calibri" pitchFamily="34" charset="0"/>
                 <a:ea typeface="Calibri" pitchFamily="34" charset="-122"/>
@@ -3024,7 +2966,7 @@
             <a:r>
               <a:rPr lang="en-US" sz="900" dirty="0">
                 <a:solidFill>
-                  <a:srgbClr val="94A3B8"/>
+                  <a:srgbClr val="64748B"/>
                 </a:solidFill>
                 <a:latin typeface="Calibri" pitchFamily="34" charset="0"/>
                 <a:ea typeface="Calibri" pitchFamily="34" charset="-122"/>
@@ -3036,38 +2978,9 @@
           </a:p>
         </p:txBody>
       </p:sp>
-      <p:sp>
-        <p:nvSpPr>
-          <p:cNvPr id="8" name="Shape 5"/>
-          <p:cNvSpPr/>
-          <p:nvPr/>
-        </p:nvSpPr>
-        <p:spPr>
-          <a:xfrm>
-            <a:off x="7772400" y="4590288"/>
-            <a:ext cx="969264" cy="475488"/>
-          </a:xfrm>
-          <a:prstGeom prst="roundRect">
-            <a:avLst>
-              <a:gd name="adj" fmla="val 11538"/>
-            </a:avLst>
-          </a:prstGeom>
-          <a:solidFill>
-            <a:srgbClr val="FFFFFF"/>
-          </a:solidFill>
-          <a:ln/>
-          <a:effectLst>
-            <a:outerShdw sx="100000" sy="100000" kx="0" ky="0" algn="bl" rotWithShape="0" blurRad="101600" dist="38100" dir="5400000">
-              <a:srgbClr val="000000">
-                <a:alpha val="35000"/>
-              </a:srgbClr>
-            </a:outerShdw>
-          </a:effectLst>
-        </p:spPr>
-      </p:sp>
       <p:pic>
         <p:nvPicPr>
-          <p:cNvPr id="9" name="Image 1" descr="/Users/pop7/Library/CloudStorage/OneDrive-MonsterConnectCo.,Ltd/Lecture/KOSEN69 - software-security/slides/pptx/assets/logo-small.png">    </p:cNvPr>
+          <p:cNvPr id="8" name="Image 1" descr="/Users/pop7/Library/CloudStorage/OneDrive-MonsterConnectCo.,Ltd/Lecture/KOSEN69 - software-security/slides/pptx/assets/logo-small.png">    </p:cNvPr>
           <p:cNvPicPr>
             <a:picLocks noChangeAspect="1"/>
           </p:cNvPicPr>
@@ -3081,7 +2994,7 @@
         </p:blipFill>
         <p:spPr>
           <a:xfrm>
-            <a:off x="7872984" y="4681728"/>
+            <a:off x="7882128" y="4700016"/>
             <a:ext cx="768096" cy="356616"/>
           </a:xfrm>
           <a:prstGeom prst="rect">
@@ -3103,7 +3016,7 @@
     <p:bg>
       <p:bgPr>
         <a:solidFill>
-          <a:srgbClr val="0E1726"/>
+          <a:srgbClr val="FFFFFF"/>
         </a:solidFill>
       </p:bgPr>
     </p:bg>
@@ -3140,9 +3053,9 @@
           </a:solidFill>
           <a:ln/>
           <a:effectLst>
-            <a:outerShdw sx="100000" sy="100000" kx="0" ky="0" algn="bl" rotWithShape="0" blurRad="101600" dist="38100" dir="5400000">
+            <a:outerShdw sx="100000" sy="100000" kx="0" ky="0" algn="bl" rotWithShape="0" blurRad="76200" dist="25400" dir="5400000">
               <a:srgbClr val="000000">
-                <a:alpha val="35000"/>
+                <a:alpha val="12000"/>
               </a:srgbClr>
             </a:outerShdw>
           </a:effectLst>
@@ -3199,7 +3112,7 @@
             <a:r>
               <a:rPr lang="en-US" sz="2600" b="1" dirty="0">
                 <a:solidFill>
-                  <a:srgbClr val="E6EDF3"/>
+                  <a:srgbClr val="1F2937"/>
                 </a:solidFill>
                 <a:latin typeface="Arial" pitchFamily="34" charset="0"/>
                 <a:ea typeface="Arial" pitchFamily="34" charset="-122"/>
@@ -3228,13 +3141,13 @@
             </a:avLst>
           </a:prstGeom>
           <a:solidFill>
-            <a:srgbClr val="18243A"/>
+            <a:srgbClr val="F1F5F9"/>
           </a:solidFill>
           <a:ln/>
           <a:effectLst>
-            <a:outerShdw sx="100000" sy="100000" kx="0" ky="0" algn="bl" rotWithShape="0" blurRad="101600" dist="38100" dir="5400000">
+            <a:outerShdw sx="100000" sy="100000" kx="0" ky="0" algn="bl" rotWithShape="0" blurRad="76200" dist="25400" dir="5400000">
               <a:srgbClr val="000000">
-                <a:alpha val="35000"/>
+                <a:alpha val="12000"/>
               </a:srgbClr>
             </a:outerShdw>
           </a:effectLst>
@@ -3271,7 +3184,7 @@
             <a:r>
               <a:rPr lang="en-US" sz="1400" dirty="0">
                 <a:solidFill>
-                  <a:srgbClr val="E6EDF3"/>
+                  <a:srgbClr val="1F2937"/>
                 </a:solidFill>
                 <a:latin typeface="Calibri" pitchFamily="34" charset="0"/>
                 <a:ea typeface="Calibri" pitchFamily="34" charset="-122"/>
@@ -3292,7 +3205,7 @@
             <a:r>
               <a:rPr lang="en-US" sz="1400" dirty="0">
                 <a:solidFill>
-                  <a:srgbClr val="E6EDF3"/>
+                  <a:srgbClr val="1F2937"/>
                 </a:solidFill>
                 <a:latin typeface="Calibri" pitchFamily="34" charset="0"/>
                 <a:ea typeface="Calibri" pitchFamily="34" charset="-122"/>
@@ -3313,7 +3226,7 @@
             <a:r>
               <a:rPr lang="en-US" sz="1400" dirty="0">
                 <a:solidFill>
-                  <a:srgbClr val="E6EDF3"/>
+                  <a:srgbClr val="1F2937"/>
                 </a:solidFill>
                 <a:latin typeface="Calibri" pitchFamily="34" charset="0"/>
                 <a:ea typeface="Calibri" pitchFamily="34" charset="-122"/>
@@ -3352,7 +3265,7 @@
             <a:r>
               <a:rPr lang="en-US" sz="900" dirty="0">
                 <a:solidFill>
-                  <a:srgbClr val="94A3B8"/>
+                  <a:srgbClr val="64748B"/>
                 </a:solidFill>
                 <a:latin typeface="Calibri" pitchFamily="34" charset="0"/>
                 <a:ea typeface="Calibri" pitchFamily="34" charset="-122"/>
@@ -3364,38 +3277,9 @@
           </a:p>
         </p:txBody>
       </p:sp>
-      <p:sp>
-        <p:nvSpPr>
-          <p:cNvPr id="8" name="Shape 5"/>
-          <p:cNvSpPr/>
-          <p:nvPr/>
-        </p:nvSpPr>
-        <p:spPr>
-          <a:xfrm>
-            <a:off x="7772400" y="4590288"/>
-            <a:ext cx="969264" cy="475488"/>
-          </a:xfrm>
-          <a:prstGeom prst="roundRect">
-            <a:avLst>
-              <a:gd name="adj" fmla="val 11538"/>
-            </a:avLst>
-          </a:prstGeom>
-          <a:solidFill>
-            <a:srgbClr val="FFFFFF"/>
-          </a:solidFill>
-          <a:ln/>
-          <a:effectLst>
-            <a:outerShdw sx="100000" sy="100000" kx="0" ky="0" algn="bl" rotWithShape="0" blurRad="101600" dist="38100" dir="5400000">
-              <a:srgbClr val="000000">
-                <a:alpha val="35000"/>
-              </a:srgbClr>
-            </a:outerShdw>
-          </a:effectLst>
-        </p:spPr>
-      </p:sp>
       <p:pic>
         <p:nvPicPr>
-          <p:cNvPr id="9" name="Image 1" descr="/Users/pop7/Library/CloudStorage/OneDrive-MonsterConnectCo.,Ltd/Lecture/KOSEN69 - software-security/slides/pptx/assets/logo-small.png">    </p:cNvPr>
+          <p:cNvPr id="8" name="Image 1" descr="/Users/pop7/Library/CloudStorage/OneDrive-MonsterConnectCo.,Ltd/Lecture/KOSEN69 - software-security/slides/pptx/assets/logo-small.png">    </p:cNvPr>
           <p:cNvPicPr>
             <a:picLocks noChangeAspect="1"/>
           </p:cNvPicPr>
@@ -3409,7 +3293,7 @@
         </p:blipFill>
         <p:spPr>
           <a:xfrm>
-            <a:off x="7872984" y="4681728"/>
+            <a:off x="7882128" y="4700016"/>
             <a:ext cx="768096" cy="356616"/>
           </a:xfrm>
           <a:prstGeom prst="rect">
@@ -3431,7 +3315,7 @@
     <p:bg>
       <p:bgPr>
         <a:solidFill>
-          <a:srgbClr val="0E1726"/>
+          <a:srgbClr val="FFFFFF"/>
         </a:solidFill>
       </p:bgPr>
     </p:bg>
@@ -3476,7 +3360,7 @@
             <a:r>
               <a:rPr lang="en-US" sz="4600" b="1" dirty="0">
                 <a:solidFill>
-                  <a:srgbClr val="E6EDF3"/>
+                  <a:srgbClr val="1F2937"/>
                 </a:solidFill>
                 <a:latin typeface="Arial" pitchFamily="34" charset="0"/>
                 <a:ea typeface="Arial" pitchFamily="34" charset="-122"/>
@@ -3527,38 +3411,9 @@
           </a:p>
         </p:txBody>
       </p:sp>
-      <p:sp>
-        <p:nvSpPr>
-          <p:cNvPr id="4" name="Shape 2"/>
-          <p:cNvSpPr/>
-          <p:nvPr/>
-        </p:nvSpPr>
-        <p:spPr>
-          <a:xfrm>
-            <a:off x="7772400" y="4590288"/>
-            <a:ext cx="969264" cy="475488"/>
-          </a:xfrm>
-          <a:prstGeom prst="roundRect">
-            <a:avLst>
-              <a:gd name="adj" fmla="val 11538"/>
-            </a:avLst>
-          </a:prstGeom>
-          <a:solidFill>
-            <a:srgbClr val="FFFFFF"/>
-          </a:solidFill>
-          <a:ln/>
-          <a:effectLst>
-            <a:outerShdw sx="100000" sy="100000" kx="0" ky="0" algn="bl" rotWithShape="0" blurRad="101600" dist="38100" dir="5400000">
-              <a:srgbClr val="000000">
-                <a:alpha val="35000"/>
-              </a:srgbClr>
-            </a:outerShdw>
-          </a:effectLst>
-        </p:spPr>
-      </p:sp>
       <p:pic>
         <p:nvPicPr>
-          <p:cNvPr id="5" name="Image 0" descr="/Users/pop7/Library/CloudStorage/OneDrive-MonsterConnectCo.,Ltd/Lecture/KOSEN69 - software-security/slides/pptx/assets/logo-small.png">    </p:cNvPr>
+          <p:cNvPr id="4" name="Image 0" descr="/Users/pop7/Library/CloudStorage/OneDrive-MonsterConnectCo.,Ltd/Lecture/KOSEN69 - software-security/slides/pptx/assets/logo-small.png">    </p:cNvPr>
           <p:cNvPicPr>
             <a:picLocks noChangeAspect="1"/>
           </p:cNvPicPr>
@@ -3572,7 +3427,7 @@
         </p:blipFill>
         <p:spPr>
           <a:xfrm>
-            <a:off x="7872984" y="4681728"/>
+            <a:off x="7882128" y="4700016"/>
             <a:ext cx="768096" cy="356616"/>
           </a:xfrm>
           <a:prstGeom prst="rect">
@@ -3594,7 +3449,7 @@
     <p:bg>
       <p:bgPr>
         <a:solidFill>
-          <a:srgbClr val="0E1726"/>
+          <a:srgbClr val="FFFFFF"/>
         </a:solidFill>
       </p:bgPr>
     </p:bg>
@@ -3631,9 +3486,9 @@
           </a:solidFill>
           <a:ln/>
           <a:effectLst>
-            <a:outerShdw sx="100000" sy="100000" kx="0" ky="0" algn="bl" rotWithShape="0" blurRad="101600" dist="38100" dir="5400000">
+            <a:outerShdw sx="100000" sy="100000" kx="0" ky="0" algn="bl" rotWithShape="0" blurRad="76200" dist="25400" dir="5400000">
               <a:srgbClr val="000000">
-                <a:alpha val="35000"/>
+                <a:alpha val="12000"/>
               </a:srgbClr>
             </a:outerShdw>
           </a:effectLst>
@@ -3690,7 +3545,7 @@
             <a:r>
               <a:rPr lang="en-US" sz="2600" b="1" dirty="0">
                 <a:solidFill>
-                  <a:srgbClr val="E6EDF3"/>
+                  <a:srgbClr val="1F2937"/>
                 </a:solidFill>
                 <a:latin typeface="Arial" pitchFamily="34" charset="0"/>
                 <a:ea typeface="Arial" pitchFamily="34" charset="-122"/>
@@ -3719,13 +3574,13 @@
             </a:avLst>
           </a:prstGeom>
           <a:solidFill>
-            <a:srgbClr val="18243A"/>
+            <a:srgbClr val="F1F5F9"/>
           </a:solidFill>
           <a:ln/>
           <a:effectLst>
-            <a:outerShdw sx="100000" sy="100000" kx="0" ky="0" algn="bl" rotWithShape="0" blurRad="101600" dist="38100" dir="5400000">
+            <a:outerShdw sx="100000" sy="100000" kx="0" ky="0" algn="bl" rotWithShape="0" blurRad="76200" dist="25400" dir="5400000">
               <a:srgbClr val="000000">
-                <a:alpha val="35000"/>
+                <a:alpha val="12000"/>
               </a:srgbClr>
             </a:outerShdw>
           </a:effectLst>
@@ -3762,7 +3617,7 @@
             <a:r>
               <a:rPr lang="en-US" sz="1400" dirty="0">
                 <a:solidFill>
-                  <a:srgbClr val="E6EDF3"/>
+                  <a:srgbClr val="1F2937"/>
                 </a:solidFill>
                 <a:latin typeface="Calibri" pitchFamily="34" charset="0"/>
                 <a:ea typeface="Calibri" pitchFamily="34" charset="-122"/>
@@ -3783,7 +3638,7 @@
             <a:r>
               <a:rPr lang="en-US" sz="1400" dirty="0">
                 <a:solidFill>
-                  <a:srgbClr val="E6EDF3"/>
+                  <a:srgbClr val="1F2937"/>
                 </a:solidFill>
                 <a:latin typeface="Calibri" pitchFamily="34" charset="0"/>
                 <a:ea typeface="Calibri" pitchFamily="34" charset="-122"/>
@@ -3804,7 +3659,7 @@
             <a:r>
               <a:rPr lang="en-US" sz="1400" dirty="0">
                 <a:solidFill>
-                  <a:srgbClr val="E6EDF3"/>
+                  <a:srgbClr val="1F2937"/>
                 </a:solidFill>
                 <a:latin typeface="Calibri" pitchFamily="34" charset="0"/>
                 <a:ea typeface="Calibri" pitchFamily="34" charset="-122"/>
@@ -3825,7 +3680,7 @@
             <a:r>
               <a:rPr lang="en-US" sz="1400" dirty="0">
                 <a:solidFill>
-                  <a:srgbClr val="E6EDF3"/>
+                  <a:srgbClr val="1F2937"/>
                 </a:solidFill>
                 <a:latin typeface="Calibri" pitchFamily="34" charset="0"/>
                 <a:ea typeface="Calibri" pitchFamily="34" charset="-122"/>
@@ -3846,7 +3701,7 @@
             <a:r>
               <a:rPr lang="en-US" sz="1400" dirty="0">
                 <a:solidFill>
-                  <a:srgbClr val="E6EDF3"/>
+                  <a:srgbClr val="1F2937"/>
                 </a:solidFill>
                 <a:latin typeface="Calibri" pitchFamily="34" charset="0"/>
                 <a:ea typeface="Calibri" pitchFamily="34" charset="-122"/>
@@ -3885,7 +3740,7 @@
             <a:r>
               <a:rPr lang="en-US" sz="900" dirty="0">
                 <a:solidFill>
-                  <a:srgbClr val="94A3B8"/>
+                  <a:srgbClr val="64748B"/>
                 </a:solidFill>
                 <a:latin typeface="Calibri" pitchFamily="34" charset="0"/>
                 <a:ea typeface="Calibri" pitchFamily="34" charset="-122"/>
@@ -3897,38 +3752,9 @@
           </a:p>
         </p:txBody>
       </p:sp>
-      <p:sp>
-        <p:nvSpPr>
-          <p:cNvPr id="8" name="Shape 5"/>
-          <p:cNvSpPr/>
-          <p:nvPr/>
-        </p:nvSpPr>
-        <p:spPr>
-          <a:xfrm>
-            <a:off x="7772400" y="4590288"/>
-            <a:ext cx="969264" cy="475488"/>
-          </a:xfrm>
-          <a:prstGeom prst="roundRect">
-            <a:avLst>
-              <a:gd name="adj" fmla="val 11538"/>
-            </a:avLst>
-          </a:prstGeom>
-          <a:solidFill>
-            <a:srgbClr val="FFFFFF"/>
-          </a:solidFill>
-          <a:ln/>
-          <a:effectLst>
-            <a:outerShdw sx="100000" sy="100000" kx="0" ky="0" algn="bl" rotWithShape="0" blurRad="101600" dist="38100" dir="5400000">
-              <a:srgbClr val="000000">
-                <a:alpha val="35000"/>
-              </a:srgbClr>
-            </a:outerShdw>
-          </a:effectLst>
-        </p:spPr>
-      </p:sp>
       <p:pic>
         <p:nvPicPr>
-          <p:cNvPr id="9" name="Image 1" descr="/Users/pop7/Library/CloudStorage/OneDrive-MonsterConnectCo.,Ltd/Lecture/KOSEN69 - software-security/slides/pptx/assets/logo-small.png">    </p:cNvPr>
+          <p:cNvPr id="8" name="Image 1" descr="/Users/pop7/Library/CloudStorage/OneDrive-MonsterConnectCo.,Ltd/Lecture/KOSEN69 - software-security/slides/pptx/assets/logo-small.png">    </p:cNvPr>
           <p:cNvPicPr>
             <a:picLocks noChangeAspect="1"/>
           </p:cNvPicPr>
@@ -3942,7 +3768,7 @@
         </p:blipFill>
         <p:spPr>
           <a:xfrm>
-            <a:off x="7872984" y="4681728"/>
+            <a:off x="7882128" y="4700016"/>
             <a:ext cx="768096" cy="356616"/>
           </a:xfrm>
           <a:prstGeom prst="rect">
@@ -3964,7 +3790,7 @@
     <p:bg>
       <p:bgPr>
         <a:solidFill>
-          <a:srgbClr val="0E1726"/>
+          <a:srgbClr val="FFFFFF"/>
         </a:solidFill>
       </p:bgPr>
     </p:bg>
@@ -4001,9 +3827,9 @@
           </a:solidFill>
           <a:ln/>
           <a:effectLst>
-            <a:outerShdw sx="100000" sy="100000" kx="0" ky="0" algn="bl" rotWithShape="0" blurRad="101600" dist="38100" dir="5400000">
+            <a:outerShdw sx="100000" sy="100000" kx="0" ky="0" algn="bl" rotWithShape="0" blurRad="76200" dist="25400" dir="5400000">
               <a:srgbClr val="000000">
-                <a:alpha val="35000"/>
+                <a:alpha val="12000"/>
               </a:srgbClr>
             </a:outerShdw>
           </a:effectLst>
@@ -4060,7 +3886,7 @@
             <a:r>
               <a:rPr lang="en-US" sz="2600" b="1" dirty="0">
                 <a:solidFill>
-                  <a:srgbClr val="E6EDF3"/>
+                  <a:srgbClr val="1F2937"/>
                 </a:solidFill>
                 <a:latin typeface="Arial" pitchFamily="34" charset="0"/>
                 <a:ea typeface="Arial" pitchFamily="34" charset="-122"/>
@@ -4089,13 +3915,13 @@
             </a:avLst>
           </a:prstGeom>
           <a:solidFill>
-            <a:srgbClr val="18243A"/>
+            <a:srgbClr val="F1F5F9"/>
           </a:solidFill>
           <a:ln/>
           <a:effectLst>
-            <a:outerShdw sx="100000" sy="100000" kx="0" ky="0" algn="bl" rotWithShape="0" blurRad="101600" dist="38100" dir="5400000">
+            <a:outerShdw sx="100000" sy="100000" kx="0" ky="0" algn="bl" rotWithShape="0" blurRad="76200" dist="25400" dir="5400000">
               <a:srgbClr val="000000">
-                <a:alpha val="35000"/>
+                <a:alpha val="12000"/>
               </a:srgbClr>
             </a:outerShdw>
           </a:effectLst>
@@ -4132,7 +3958,7 @@
             <a:r>
               <a:rPr lang="en-US" sz="1400" dirty="0">
                 <a:solidFill>
-                  <a:srgbClr val="E6EDF3"/>
+                  <a:srgbClr val="1F2937"/>
                 </a:solidFill>
                 <a:latin typeface="Calibri" pitchFamily="34" charset="0"/>
                 <a:ea typeface="Calibri" pitchFamily="34" charset="-122"/>
@@ -4153,7 +3979,7 @@
             <a:r>
               <a:rPr lang="en-US" sz="1400" dirty="0">
                 <a:solidFill>
-                  <a:srgbClr val="E6EDF3"/>
+                  <a:srgbClr val="1F2937"/>
                 </a:solidFill>
                 <a:latin typeface="Calibri" pitchFamily="34" charset="0"/>
                 <a:ea typeface="Calibri" pitchFamily="34" charset="-122"/>
@@ -4174,7 +4000,7 @@
             <a:r>
               <a:rPr lang="en-US" sz="1400" dirty="0">
                 <a:solidFill>
-                  <a:srgbClr val="E6EDF3"/>
+                  <a:srgbClr val="1F2937"/>
                 </a:solidFill>
                 <a:latin typeface="Calibri" pitchFamily="34" charset="0"/>
                 <a:ea typeface="Calibri" pitchFamily="34" charset="-122"/>
@@ -4213,7 +4039,7 @@
             <a:r>
               <a:rPr lang="en-US" sz="900" dirty="0">
                 <a:solidFill>
-                  <a:srgbClr val="94A3B8"/>
+                  <a:srgbClr val="64748B"/>
                 </a:solidFill>
                 <a:latin typeface="Calibri" pitchFamily="34" charset="0"/>
                 <a:ea typeface="Calibri" pitchFamily="34" charset="-122"/>
@@ -4225,38 +4051,9 @@
           </a:p>
         </p:txBody>
       </p:sp>
-      <p:sp>
-        <p:nvSpPr>
-          <p:cNvPr id="8" name="Shape 5"/>
-          <p:cNvSpPr/>
-          <p:nvPr/>
-        </p:nvSpPr>
-        <p:spPr>
-          <a:xfrm>
-            <a:off x="7772400" y="4590288"/>
-            <a:ext cx="969264" cy="475488"/>
-          </a:xfrm>
-          <a:prstGeom prst="roundRect">
-            <a:avLst>
-              <a:gd name="adj" fmla="val 11538"/>
-            </a:avLst>
-          </a:prstGeom>
-          <a:solidFill>
-            <a:srgbClr val="FFFFFF"/>
-          </a:solidFill>
-          <a:ln/>
-          <a:effectLst>
-            <a:outerShdw sx="100000" sy="100000" kx="0" ky="0" algn="bl" rotWithShape="0" blurRad="101600" dist="38100" dir="5400000">
-              <a:srgbClr val="000000">
-                <a:alpha val="35000"/>
-              </a:srgbClr>
-            </a:outerShdw>
-          </a:effectLst>
-        </p:spPr>
-      </p:sp>
       <p:pic>
         <p:nvPicPr>
-          <p:cNvPr id="9" name="Image 1" descr="/Users/pop7/Library/CloudStorage/OneDrive-MonsterConnectCo.,Ltd/Lecture/KOSEN69 - software-security/slides/pptx/assets/logo-small.png">    </p:cNvPr>
+          <p:cNvPr id="8" name="Image 1" descr="/Users/pop7/Library/CloudStorage/OneDrive-MonsterConnectCo.,Ltd/Lecture/KOSEN69 - software-security/slides/pptx/assets/logo-small.png">    </p:cNvPr>
           <p:cNvPicPr>
             <a:picLocks noChangeAspect="1"/>
           </p:cNvPicPr>
@@ -4270,7 +4067,7 @@
         </p:blipFill>
         <p:spPr>
           <a:xfrm>
-            <a:off x="7872984" y="4681728"/>
+            <a:off x="7882128" y="4700016"/>
             <a:ext cx="768096" cy="356616"/>
           </a:xfrm>
           <a:prstGeom prst="rect">
@@ -4292,7 +4089,7 @@
     <p:bg>
       <p:bgPr>
         <a:solidFill>
-          <a:srgbClr val="0E1726"/>
+          <a:srgbClr val="FFFFFF"/>
         </a:solidFill>
       </p:bgPr>
     </p:bg>
@@ -4329,9 +4126,9 @@
           </a:solidFill>
           <a:ln/>
           <a:effectLst>
-            <a:outerShdw sx="100000" sy="100000" kx="0" ky="0" algn="bl" rotWithShape="0" blurRad="101600" dist="38100" dir="5400000">
+            <a:outerShdw sx="100000" sy="100000" kx="0" ky="0" algn="bl" rotWithShape="0" blurRad="76200" dist="25400" dir="5400000">
               <a:srgbClr val="000000">
-                <a:alpha val="35000"/>
+                <a:alpha val="12000"/>
               </a:srgbClr>
             </a:outerShdw>
           </a:effectLst>
@@ -4388,7 +4185,7 @@
             <a:r>
               <a:rPr lang="en-US" sz="2600" b="1" dirty="0">
                 <a:solidFill>
-                  <a:srgbClr val="E6EDF3"/>
+                  <a:srgbClr val="1F2937"/>
                 </a:solidFill>
                 <a:latin typeface="Arial" pitchFamily="34" charset="0"/>
                 <a:ea typeface="Arial" pitchFamily="34" charset="-122"/>
@@ -4417,13 +4214,13 @@
             </a:avLst>
           </a:prstGeom>
           <a:solidFill>
-            <a:srgbClr val="18243A"/>
+            <a:srgbClr val="F1F5F9"/>
           </a:solidFill>
           <a:ln/>
           <a:effectLst>
-            <a:outerShdw sx="100000" sy="100000" kx="0" ky="0" algn="bl" rotWithShape="0" blurRad="101600" dist="38100" dir="5400000">
+            <a:outerShdw sx="100000" sy="100000" kx="0" ky="0" algn="bl" rotWithShape="0" blurRad="76200" dist="25400" dir="5400000">
               <a:srgbClr val="000000">
-                <a:alpha val="35000"/>
+                <a:alpha val="12000"/>
               </a:srgbClr>
             </a:outerShdw>
           </a:effectLst>
@@ -4460,7 +4257,7 @@
             <a:r>
               <a:rPr lang="en-US" sz="1400" dirty="0">
                 <a:solidFill>
-                  <a:srgbClr val="E6EDF3"/>
+                  <a:srgbClr val="1F2937"/>
                 </a:solidFill>
                 <a:latin typeface="Calibri" pitchFamily="34" charset="0"/>
                 <a:ea typeface="Calibri" pitchFamily="34" charset="-122"/>
@@ -4481,7 +4278,7 @@
             <a:r>
               <a:rPr lang="en-US" sz="1400" dirty="0">
                 <a:solidFill>
-                  <a:srgbClr val="E6EDF3"/>
+                  <a:srgbClr val="1F2937"/>
                 </a:solidFill>
                 <a:latin typeface="Calibri" pitchFamily="34" charset="0"/>
                 <a:ea typeface="Calibri" pitchFamily="34" charset="-122"/>
@@ -4502,7 +4299,7 @@
             <a:r>
               <a:rPr lang="en-US" sz="1400" dirty="0">
                 <a:solidFill>
-                  <a:srgbClr val="E6EDF3"/>
+                  <a:srgbClr val="1F2937"/>
                 </a:solidFill>
                 <a:latin typeface="Calibri" pitchFamily="34" charset="0"/>
                 <a:ea typeface="Calibri" pitchFamily="34" charset="-122"/>
@@ -4541,7 +4338,7 @@
             <a:r>
               <a:rPr lang="en-US" sz="900" dirty="0">
                 <a:solidFill>
-                  <a:srgbClr val="94A3B8"/>
+                  <a:srgbClr val="64748B"/>
                 </a:solidFill>
                 <a:latin typeface="Calibri" pitchFamily="34" charset="0"/>
                 <a:ea typeface="Calibri" pitchFamily="34" charset="-122"/>
@@ -4553,38 +4350,9 @@
           </a:p>
         </p:txBody>
       </p:sp>
-      <p:sp>
-        <p:nvSpPr>
-          <p:cNvPr id="8" name="Shape 5"/>
-          <p:cNvSpPr/>
-          <p:nvPr/>
-        </p:nvSpPr>
-        <p:spPr>
-          <a:xfrm>
-            <a:off x="7772400" y="4590288"/>
-            <a:ext cx="969264" cy="475488"/>
-          </a:xfrm>
-          <a:prstGeom prst="roundRect">
-            <a:avLst>
-              <a:gd name="adj" fmla="val 11538"/>
-            </a:avLst>
-          </a:prstGeom>
-          <a:solidFill>
-            <a:srgbClr val="FFFFFF"/>
-          </a:solidFill>
-          <a:ln/>
-          <a:effectLst>
-            <a:outerShdw sx="100000" sy="100000" kx="0" ky="0" algn="bl" rotWithShape="0" blurRad="101600" dist="38100" dir="5400000">
-              <a:srgbClr val="000000">
-                <a:alpha val="35000"/>
-              </a:srgbClr>
-            </a:outerShdw>
-          </a:effectLst>
-        </p:spPr>
-      </p:sp>
       <p:pic>
         <p:nvPicPr>
-          <p:cNvPr id="9" name="Image 1" descr="/Users/pop7/Library/CloudStorage/OneDrive-MonsterConnectCo.,Ltd/Lecture/KOSEN69 - software-security/slides/pptx/assets/logo-small.png">    </p:cNvPr>
+          <p:cNvPr id="8" name="Image 1" descr="/Users/pop7/Library/CloudStorage/OneDrive-MonsterConnectCo.,Ltd/Lecture/KOSEN69 - software-security/slides/pptx/assets/logo-small.png">    </p:cNvPr>
           <p:cNvPicPr>
             <a:picLocks noChangeAspect="1"/>
           </p:cNvPicPr>
@@ -4598,7 +4366,7 @@
         </p:blipFill>
         <p:spPr>
           <a:xfrm>
-            <a:off x="7872984" y="4681728"/>
+            <a:off x="7882128" y="4700016"/>
             <a:ext cx="768096" cy="356616"/>
           </a:xfrm>
           <a:prstGeom prst="rect">
@@ -4620,7 +4388,7 @@
     <p:bg>
       <p:bgPr>
         <a:solidFill>
-          <a:srgbClr val="0E1726"/>
+          <a:srgbClr val="FFFFFF"/>
         </a:solidFill>
       </p:bgPr>
     </p:bg>
@@ -4657,9 +4425,9 @@
           </a:solidFill>
           <a:ln/>
           <a:effectLst>
-            <a:outerShdw sx="100000" sy="100000" kx="0" ky="0" algn="bl" rotWithShape="0" blurRad="101600" dist="38100" dir="5400000">
+            <a:outerShdw sx="100000" sy="100000" kx="0" ky="0" algn="bl" rotWithShape="0" blurRad="76200" dist="25400" dir="5400000">
               <a:srgbClr val="000000">
-                <a:alpha val="35000"/>
+                <a:alpha val="12000"/>
               </a:srgbClr>
             </a:outerShdw>
           </a:effectLst>
@@ -4716,7 +4484,7 @@
             <a:r>
               <a:rPr lang="en-US" sz="2600" b="1" dirty="0">
                 <a:solidFill>
-                  <a:srgbClr val="E6EDF3"/>
+                  <a:srgbClr val="1F2937"/>
                 </a:solidFill>
                 <a:latin typeface="Arial" pitchFamily="34" charset="0"/>
                 <a:ea typeface="Arial" pitchFamily="34" charset="-122"/>
@@ -4749,7 +4517,7 @@
           </a:solidFill>
           <a:ln w="12700">
             <a:solidFill>
-              <a:srgbClr val="1E2B45"/>
+              <a:srgbClr val="E8EDF3"/>
             </a:solidFill>
             <a:prstDash val="solid"/>
           </a:ln>
@@ -4811,13 +4579,13 @@
             </a:avLst>
           </a:prstGeom>
           <a:solidFill>
-            <a:srgbClr val="18243A"/>
+            <a:srgbClr val="F1F5F9"/>
           </a:solidFill>
           <a:ln/>
           <a:effectLst>
-            <a:outerShdw sx="100000" sy="100000" kx="0" ky="0" algn="bl" rotWithShape="0" blurRad="101600" dist="38100" dir="5400000">
+            <a:outerShdw sx="100000" sy="100000" kx="0" ky="0" algn="bl" rotWithShape="0" blurRad="76200" dist="25400" dir="5400000">
               <a:srgbClr val="000000">
-                <a:alpha val="35000"/>
+                <a:alpha val="12000"/>
               </a:srgbClr>
             </a:outerShdw>
           </a:effectLst>
@@ -4854,7 +4622,7 @@
             <a:r>
               <a:rPr lang="en-US" sz="1400" dirty="0">
                 <a:solidFill>
-                  <a:srgbClr val="E6EDF3"/>
+                  <a:srgbClr val="1F2937"/>
                 </a:solidFill>
                 <a:latin typeface="Calibri" pitchFamily="34" charset="0"/>
                 <a:ea typeface="Calibri" pitchFamily="34" charset="-122"/>
@@ -4875,7 +4643,7 @@
             <a:r>
               <a:rPr lang="en-US" sz="1400" dirty="0">
                 <a:solidFill>
-                  <a:srgbClr val="E6EDF3"/>
+                  <a:srgbClr val="1F2937"/>
                 </a:solidFill>
                 <a:latin typeface="Calibri" pitchFamily="34" charset="0"/>
                 <a:ea typeface="Calibri" pitchFamily="34" charset="-122"/>
@@ -4896,7 +4664,7 @@
             <a:r>
               <a:rPr lang="en-US" sz="1400" dirty="0">
                 <a:solidFill>
-                  <a:srgbClr val="E6EDF3"/>
+                  <a:srgbClr val="1F2937"/>
                 </a:solidFill>
                 <a:latin typeface="Calibri" pitchFamily="34" charset="0"/>
                 <a:ea typeface="Calibri" pitchFamily="34" charset="-122"/>
@@ -4935,7 +4703,7 @@
             <a:r>
               <a:rPr lang="en-US" sz="900" dirty="0">
                 <a:solidFill>
-                  <a:srgbClr val="94A3B8"/>
+                  <a:srgbClr val="64748B"/>
                 </a:solidFill>
                 <a:latin typeface="Calibri" pitchFamily="34" charset="0"/>
                 <a:ea typeface="Calibri" pitchFamily="34" charset="-122"/>
@@ -4947,38 +4715,9 @@
           </a:p>
         </p:txBody>
       </p:sp>
-      <p:sp>
-        <p:nvSpPr>
-          <p:cNvPr id="10" name="Shape 7"/>
-          <p:cNvSpPr/>
-          <p:nvPr/>
-        </p:nvSpPr>
-        <p:spPr>
-          <a:xfrm>
-            <a:off x="7772400" y="4590288"/>
-            <a:ext cx="969264" cy="475488"/>
-          </a:xfrm>
-          <a:prstGeom prst="roundRect">
-            <a:avLst>
-              <a:gd name="adj" fmla="val 11538"/>
-            </a:avLst>
-          </a:prstGeom>
-          <a:solidFill>
-            <a:srgbClr val="FFFFFF"/>
-          </a:solidFill>
-          <a:ln/>
-          <a:effectLst>
-            <a:outerShdw sx="100000" sy="100000" kx="0" ky="0" algn="bl" rotWithShape="0" blurRad="101600" dist="38100" dir="5400000">
-              <a:srgbClr val="000000">
-                <a:alpha val="35000"/>
-              </a:srgbClr>
-            </a:outerShdw>
-          </a:effectLst>
-        </p:spPr>
-      </p:sp>
       <p:pic>
         <p:nvPicPr>
-          <p:cNvPr id="11" name="Image 1" descr="/Users/pop7/Library/CloudStorage/OneDrive-MonsterConnectCo.,Ltd/Lecture/KOSEN69 - software-security/slides/pptx/assets/logo-small.png">    </p:cNvPr>
+          <p:cNvPr id="10" name="Image 1" descr="/Users/pop7/Library/CloudStorage/OneDrive-MonsterConnectCo.,Ltd/Lecture/KOSEN69 - software-security/slides/pptx/assets/logo-small.png">    </p:cNvPr>
           <p:cNvPicPr>
             <a:picLocks noChangeAspect="1"/>
           </p:cNvPicPr>
@@ -4992,7 +4731,7 @@
         </p:blipFill>
         <p:spPr>
           <a:xfrm>
-            <a:off x="7872984" y="4681728"/>
+            <a:off x="7882128" y="4700016"/>
             <a:ext cx="768096" cy="356616"/>
           </a:xfrm>
           <a:prstGeom prst="rect">
@@ -5014,7 +4753,7 @@
     <p:bg>
       <p:bgPr>
         <a:solidFill>
-          <a:srgbClr val="0E1726"/>
+          <a:srgbClr val="FFFFFF"/>
         </a:solidFill>
       </p:bgPr>
     </p:bg>
@@ -5051,9 +4790,9 @@
           </a:solidFill>
           <a:ln/>
           <a:effectLst>
-            <a:outerShdw sx="100000" sy="100000" kx="0" ky="0" algn="bl" rotWithShape="0" blurRad="101600" dist="38100" dir="5400000">
+            <a:outerShdw sx="100000" sy="100000" kx="0" ky="0" algn="bl" rotWithShape="0" blurRad="76200" dist="25400" dir="5400000">
               <a:srgbClr val="000000">
-                <a:alpha val="35000"/>
+                <a:alpha val="12000"/>
               </a:srgbClr>
             </a:outerShdw>
           </a:effectLst>
@@ -5110,7 +4849,7 @@
             <a:r>
               <a:rPr lang="en-US" sz="2600" b="1" dirty="0">
                 <a:solidFill>
-                  <a:srgbClr val="E6EDF3"/>
+                  <a:srgbClr val="1F2937"/>
                 </a:solidFill>
                 <a:latin typeface="Arial" pitchFamily="34" charset="0"/>
                 <a:ea typeface="Arial" pitchFamily="34" charset="-122"/>
@@ -5139,13 +4878,13 @@
             </a:avLst>
           </a:prstGeom>
           <a:solidFill>
-            <a:srgbClr val="18243A"/>
+            <a:srgbClr val="F1F5F9"/>
           </a:solidFill>
           <a:ln/>
           <a:effectLst>
-            <a:outerShdw sx="100000" sy="100000" kx="0" ky="0" algn="bl" rotWithShape="0" blurRad="101600" dist="38100" dir="5400000">
+            <a:outerShdw sx="100000" sy="100000" kx="0" ky="0" algn="bl" rotWithShape="0" blurRad="76200" dist="25400" dir="5400000">
               <a:srgbClr val="000000">
-                <a:alpha val="35000"/>
+                <a:alpha val="12000"/>
               </a:srgbClr>
             </a:outerShdw>
           </a:effectLst>
@@ -5182,7 +4921,7 @@
             <a:r>
               <a:rPr lang="en-US" sz="1400" dirty="0">
                 <a:solidFill>
-                  <a:srgbClr val="E6EDF3"/>
+                  <a:srgbClr val="1F2937"/>
                 </a:solidFill>
                 <a:latin typeface="Calibri" pitchFamily="34" charset="0"/>
                 <a:ea typeface="Calibri" pitchFamily="34" charset="-122"/>
@@ -5203,7 +4942,7 @@
             <a:r>
               <a:rPr lang="en-US" sz="1400" dirty="0">
                 <a:solidFill>
-                  <a:srgbClr val="E6EDF3"/>
+                  <a:srgbClr val="1F2937"/>
                 </a:solidFill>
                 <a:latin typeface="Calibri" pitchFamily="34" charset="0"/>
                 <a:ea typeface="Calibri" pitchFamily="34" charset="-122"/>
@@ -5224,7 +4963,7 @@
             <a:r>
               <a:rPr lang="en-US" sz="1400" dirty="0">
                 <a:solidFill>
-                  <a:srgbClr val="E6EDF3"/>
+                  <a:srgbClr val="1F2937"/>
                 </a:solidFill>
                 <a:latin typeface="Calibri" pitchFamily="34" charset="0"/>
                 <a:ea typeface="Calibri" pitchFamily="34" charset="-122"/>
@@ -5263,7 +5002,7 @@
             <a:r>
               <a:rPr lang="en-US" sz="900" dirty="0">
                 <a:solidFill>
-                  <a:srgbClr val="94A3B8"/>
+                  <a:srgbClr val="64748B"/>
                 </a:solidFill>
                 <a:latin typeface="Calibri" pitchFamily="34" charset="0"/>
                 <a:ea typeface="Calibri" pitchFamily="34" charset="-122"/>
@@ -5275,38 +5014,9 @@
           </a:p>
         </p:txBody>
       </p:sp>
-      <p:sp>
-        <p:nvSpPr>
-          <p:cNvPr id="8" name="Shape 5"/>
-          <p:cNvSpPr/>
-          <p:nvPr/>
-        </p:nvSpPr>
-        <p:spPr>
-          <a:xfrm>
-            <a:off x="7772400" y="4590288"/>
-            <a:ext cx="969264" cy="475488"/>
-          </a:xfrm>
-          <a:prstGeom prst="roundRect">
-            <a:avLst>
-              <a:gd name="adj" fmla="val 11538"/>
-            </a:avLst>
-          </a:prstGeom>
-          <a:solidFill>
-            <a:srgbClr val="FFFFFF"/>
-          </a:solidFill>
-          <a:ln/>
-          <a:effectLst>
-            <a:outerShdw sx="100000" sy="100000" kx="0" ky="0" algn="bl" rotWithShape="0" blurRad="101600" dist="38100" dir="5400000">
-              <a:srgbClr val="000000">
-                <a:alpha val="35000"/>
-              </a:srgbClr>
-            </a:outerShdw>
-          </a:effectLst>
-        </p:spPr>
-      </p:sp>
       <p:pic>
         <p:nvPicPr>
-          <p:cNvPr id="9" name="Image 1" descr="/Users/pop7/Library/CloudStorage/OneDrive-MonsterConnectCo.,Ltd/Lecture/KOSEN69 - software-security/slides/pptx/assets/logo-small.png">    </p:cNvPr>
+          <p:cNvPr id="8" name="Image 1" descr="/Users/pop7/Library/CloudStorage/OneDrive-MonsterConnectCo.,Ltd/Lecture/KOSEN69 - software-security/slides/pptx/assets/logo-small.png">    </p:cNvPr>
           <p:cNvPicPr>
             <a:picLocks noChangeAspect="1"/>
           </p:cNvPicPr>
@@ -5320,7 +5030,7 @@
         </p:blipFill>
         <p:spPr>
           <a:xfrm>
-            <a:off x="7872984" y="4681728"/>
+            <a:off x="7882128" y="4700016"/>
             <a:ext cx="768096" cy="356616"/>
           </a:xfrm>
           <a:prstGeom prst="rect">
@@ -5342,7 +5052,7 @@
     <p:bg>
       <p:bgPr>
         <a:solidFill>
-          <a:srgbClr val="0E1726"/>
+          <a:srgbClr val="FFFFFF"/>
         </a:solidFill>
       </p:bgPr>
     </p:bg>
@@ -5379,9 +5089,9 @@
           </a:solidFill>
           <a:ln/>
           <a:effectLst>
-            <a:outerShdw sx="100000" sy="100000" kx="0" ky="0" algn="bl" rotWithShape="0" blurRad="101600" dist="38100" dir="5400000">
+            <a:outerShdw sx="100000" sy="100000" kx="0" ky="0" algn="bl" rotWithShape="0" blurRad="76200" dist="25400" dir="5400000">
               <a:srgbClr val="000000">
-                <a:alpha val="35000"/>
+                <a:alpha val="12000"/>
               </a:srgbClr>
             </a:outerShdw>
           </a:effectLst>
@@ -5438,7 +5148,7 @@
             <a:r>
               <a:rPr lang="en-US" sz="2600" b="1" dirty="0">
                 <a:solidFill>
-                  <a:srgbClr val="E6EDF3"/>
+                  <a:srgbClr val="1F2937"/>
                 </a:solidFill>
                 <a:latin typeface="Arial" pitchFamily="34" charset="0"/>
                 <a:ea typeface="Arial" pitchFamily="34" charset="-122"/>
@@ -5467,13 +5177,13 @@
             </a:avLst>
           </a:prstGeom>
           <a:solidFill>
-            <a:srgbClr val="18243A"/>
+            <a:srgbClr val="F1F5F9"/>
           </a:solidFill>
           <a:ln/>
           <a:effectLst>
-            <a:outerShdw sx="100000" sy="100000" kx="0" ky="0" algn="bl" rotWithShape="0" blurRad="101600" dist="38100" dir="5400000">
+            <a:outerShdw sx="100000" sy="100000" kx="0" ky="0" algn="bl" rotWithShape="0" blurRad="76200" dist="25400" dir="5400000">
               <a:srgbClr val="000000">
-                <a:alpha val="35000"/>
+                <a:alpha val="12000"/>
               </a:srgbClr>
             </a:outerShdw>
           </a:effectLst>
@@ -5510,7 +5220,7 @@
             <a:r>
               <a:rPr lang="en-US" sz="1400" dirty="0">
                 <a:solidFill>
-                  <a:srgbClr val="E6EDF3"/>
+                  <a:srgbClr val="1F2937"/>
                 </a:solidFill>
                 <a:latin typeface="Calibri" pitchFamily="34" charset="0"/>
                 <a:ea typeface="Calibri" pitchFamily="34" charset="-122"/>
@@ -5531,7 +5241,7 @@
             <a:r>
               <a:rPr lang="en-US" sz="1400" dirty="0">
                 <a:solidFill>
-                  <a:srgbClr val="E6EDF3"/>
+                  <a:srgbClr val="1F2937"/>
                 </a:solidFill>
                 <a:latin typeface="Calibri" pitchFamily="34" charset="0"/>
                 <a:ea typeface="Calibri" pitchFamily="34" charset="-122"/>
@@ -5552,7 +5262,7 @@
             <a:r>
               <a:rPr lang="en-US" sz="1400" dirty="0">
                 <a:solidFill>
-                  <a:srgbClr val="E6EDF3"/>
+                  <a:srgbClr val="1F2937"/>
                 </a:solidFill>
                 <a:latin typeface="Calibri" pitchFamily="34" charset="0"/>
                 <a:ea typeface="Calibri" pitchFamily="34" charset="-122"/>
@@ -5591,7 +5301,7 @@
             <a:r>
               <a:rPr lang="en-US" sz="900" dirty="0">
                 <a:solidFill>
-                  <a:srgbClr val="94A3B8"/>
+                  <a:srgbClr val="64748B"/>
                 </a:solidFill>
                 <a:latin typeface="Calibri" pitchFamily="34" charset="0"/>
                 <a:ea typeface="Calibri" pitchFamily="34" charset="-122"/>
@@ -5603,38 +5313,9 @@
           </a:p>
         </p:txBody>
       </p:sp>
-      <p:sp>
-        <p:nvSpPr>
-          <p:cNvPr id="8" name="Shape 5"/>
-          <p:cNvSpPr/>
-          <p:nvPr/>
-        </p:nvSpPr>
-        <p:spPr>
-          <a:xfrm>
-            <a:off x="7772400" y="4590288"/>
-            <a:ext cx="969264" cy="475488"/>
-          </a:xfrm>
-          <a:prstGeom prst="roundRect">
-            <a:avLst>
-              <a:gd name="adj" fmla="val 11538"/>
-            </a:avLst>
-          </a:prstGeom>
-          <a:solidFill>
-            <a:srgbClr val="FFFFFF"/>
-          </a:solidFill>
-          <a:ln/>
-          <a:effectLst>
-            <a:outerShdw sx="100000" sy="100000" kx="0" ky="0" algn="bl" rotWithShape="0" blurRad="101600" dist="38100" dir="5400000">
-              <a:srgbClr val="000000">
-                <a:alpha val="35000"/>
-              </a:srgbClr>
-            </a:outerShdw>
-          </a:effectLst>
-        </p:spPr>
-      </p:sp>
       <p:pic>
         <p:nvPicPr>
-          <p:cNvPr id="9" name="Image 1" descr="/Users/pop7/Library/CloudStorage/OneDrive-MonsterConnectCo.,Ltd/Lecture/KOSEN69 - software-security/slides/pptx/assets/logo-small.png">    </p:cNvPr>
+          <p:cNvPr id="8" name="Image 1" descr="/Users/pop7/Library/CloudStorage/OneDrive-MonsterConnectCo.,Ltd/Lecture/KOSEN69 - software-security/slides/pptx/assets/logo-small.png">    </p:cNvPr>
           <p:cNvPicPr>
             <a:picLocks noChangeAspect="1"/>
           </p:cNvPicPr>
@@ -5648,7 +5329,7 @@
         </p:blipFill>
         <p:spPr>
           <a:xfrm>
-            <a:off x="7872984" y="4681728"/>
+            <a:off x="7882128" y="4700016"/>
             <a:ext cx="768096" cy="356616"/>
           </a:xfrm>
           <a:prstGeom prst="rect">
@@ -5670,7 +5351,7 @@
     <p:bg>
       <p:bgPr>
         <a:solidFill>
-          <a:srgbClr val="0E1726"/>
+          <a:srgbClr val="FFFFFF"/>
         </a:solidFill>
       </p:bgPr>
     </p:bg>
@@ -5707,9 +5388,9 @@
           </a:solidFill>
           <a:ln/>
           <a:effectLst>
-            <a:outerShdw sx="100000" sy="100000" kx="0" ky="0" algn="bl" rotWithShape="0" blurRad="101600" dist="38100" dir="5400000">
+            <a:outerShdw sx="100000" sy="100000" kx="0" ky="0" algn="bl" rotWithShape="0" blurRad="76200" dist="25400" dir="5400000">
               <a:srgbClr val="000000">
-                <a:alpha val="35000"/>
+                <a:alpha val="12000"/>
               </a:srgbClr>
             </a:outerShdw>
           </a:effectLst>
@@ -5766,7 +5447,7 @@
             <a:r>
               <a:rPr lang="en-US" sz="2600" b="1" dirty="0">
                 <a:solidFill>
-                  <a:srgbClr val="E6EDF3"/>
+                  <a:srgbClr val="1F2937"/>
                 </a:solidFill>
                 <a:latin typeface="Arial" pitchFamily="34" charset="0"/>
                 <a:ea typeface="Arial" pitchFamily="34" charset="-122"/>
@@ -5799,7 +5480,7 @@
           </a:solidFill>
           <a:ln w="12700">
             <a:solidFill>
-              <a:srgbClr val="1E2B45"/>
+              <a:srgbClr val="E8EDF3"/>
             </a:solidFill>
             <a:prstDash val="solid"/>
           </a:ln>
@@ -5878,13 +5559,13 @@
             </a:avLst>
           </a:prstGeom>
           <a:solidFill>
-            <a:srgbClr val="18243A"/>
+            <a:srgbClr val="F1F5F9"/>
           </a:solidFill>
           <a:ln/>
           <a:effectLst>
-            <a:outerShdw sx="100000" sy="100000" kx="0" ky="0" algn="bl" rotWithShape="0" blurRad="101600" dist="38100" dir="5400000">
+            <a:outerShdw sx="100000" sy="100000" kx="0" ky="0" algn="bl" rotWithShape="0" blurRad="76200" dist="25400" dir="5400000">
               <a:srgbClr val="000000">
-                <a:alpha val="35000"/>
+                <a:alpha val="12000"/>
               </a:srgbClr>
             </a:outerShdw>
           </a:effectLst>
@@ -5921,7 +5602,7 @@
             <a:r>
               <a:rPr lang="en-US" sz="1400" dirty="0">
                 <a:solidFill>
-                  <a:srgbClr val="E6EDF3"/>
+                  <a:srgbClr val="1F2937"/>
                 </a:solidFill>
                 <a:latin typeface="Calibri" pitchFamily="34" charset="0"/>
                 <a:ea typeface="Calibri" pitchFamily="34" charset="-122"/>
@@ -5942,7 +5623,7 @@
             <a:r>
               <a:rPr lang="en-US" sz="1400" dirty="0">
                 <a:solidFill>
-                  <a:srgbClr val="E6EDF3"/>
+                  <a:srgbClr val="1F2937"/>
                 </a:solidFill>
                 <a:latin typeface="Calibri" pitchFamily="34" charset="0"/>
                 <a:ea typeface="Calibri" pitchFamily="34" charset="-122"/>
@@ -5981,7 +5662,7 @@
             <a:r>
               <a:rPr lang="en-US" sz="900" dirty="0">
                 <a:solidFill>
-                  <a:srgbClr val="94A3B8"/>
+                  <a:srgbClr val="64748B"/>
                 </a:solidFill>
                 <a:latin typeface="Calibri" pitchFamily="34" charset="0"/>
                 <a:ea typeface="Calibri" pitchFamily="34" charset="-122"/>
@@ -5993,38 +5674,9 @@
           </a:p>
         </p:txBody>
       </p:sp>
-      <p:sp>
-        <p:nvSpPr>
-          <p:cNvPr id="10" name="Shape 7"/>
-          <p:cNvSpPr/>
-          <p:nvPr/>
-        </p:nvSpPr>
-        <p:spPr>
-          <a:xfrm>
-            <a:off x="7772400" y="4590288"/>
-            <a:ext cx="969264" cy="475488"/>
-          </a:xfrm>
-          <a:prstGeom prst="roundRect">
-            <a:avLst>
-              <a:gd name="adj" fmla="val 11538"/>
-            </a:avLst>
-          </a:prstGeom>
-          <a:solidFill>
-            <a:srgbClr val="FFFFFF"/>
-          </a:solidFill>
-          <a:ln/>
-          <a:effectLst>
-            <a:outerShdw sx="100000" sy="100000" kx="0" ky="0" algn="bl" rotWithShape="0" blurRad="101600" dist="38100" dir="5400000">
-              <a:srgbClr val="000000">
-                <a:alpha val="35000"/>
-              </a:srgbClr>
-            </a:outerShdw>
-          </a:effectLst>
-        </p:spPr>
-      </p:sp>
       <p:pic>
         <p:nvPicPr>
-          <p:cNvPr id="11" name="Image 1" descr="/Users/pop7/Library/CloudStorage/OneDrive-MonsterConnectCo.,Ltd/Lecture/KOSEN69 - software-security/slides/pptx/assets/logo-small.png">    </p:cNvPr>
+          <p:cNvPr id="10" name="Image 1" descr="/Users/pop7/Library/CloudStorage/OneDrive-MonsterConnectCo.,Ltd/Lecture/KOSEN69 - software-security/slides/pptx/assets/logo-small.png">    </p:cNvPr>
           <p:cNvPicPr>
             <a:picLocks noChangeAspect="1"/>
           </p:cNvPicPr>
@@ -6038,7 +5690,7 @@
         </p:blipFill>
         <p:spPr>
           <a:xfrm>
-            <a:off x="7872984" y="4681728"/>
+            <a:off x="7882128" y="4700016"/>
             <a:ext cx="768096" cy="356616"/>
           </a:xfrm>
           <a:prstGeom prst="rect">
@@ -6060,7 +5712,7 @@
     <p:bg>
       <p:bgPr>
         <a:solidFill>
-          <a:srgbClr val="0E1726"/>
+          <a:srgbClr val="FFFFFF"/>
         </a:solidFill>
       </p:bgPr>
     </p:bg>
@@ -6097,9 +5749,9 @@
           </a:solidFill>
           <a:ln/>
           <a:effectLst>
-            <a:outerShdw sx="100000" sy="100000" kx="0" ky="0" algn="bl" rotWithShape="0" blurRad="101600" dist="38100" dir="5400000">
+            <a:outerShdw sx="100000" sy="100000" kx="0" ky="0" algn="bl" rotWithShape="0" blurRad="76200" dist="25400" dir="5400000">
               <a:srgbClr val="000000">
-                <a:alpha val="35000"/>
+                <a:alpha val="12000"/>
               </a:srgbClr>
             </a:outerShdw>
           </a:effectLst>
@@ -6156,7 +5808,7 @@
             <a:r>
               <a:rPr lang="en-US" sz="2600" b="1" dirty="0">
                 <a:solidFill>
-                  <a:srgbClr val="E6EDF3"/>
+                  <a:srgbClr val="1F2937"/>
                 </a:solidFill>
                 <a:latin typeface="Arial" pitchFamily="34" charset="0"/>
                 <a:ea typeface="Arial" pitchFamily="34" charset="-122"/>
@@ -6185,13 +5837,13 @@
             </a:avLst>
           </a:prstGeom>
           <a:solidFill>
-            <a:srgbClr val="18243A"/>
+            <a:srgbClr val="F1F5F9"/>
           </a:solidFill>
           <a:ln/>
           <a:effectLst>
-            <a:outerShdw sx="100000" sy="100000" kx="0" ky="0" algn="bl" rotWithShape="0" blurRad="101600" dist="38100" dir="5400000">
+            <a:outerShdw sx="100000" sy="100000" kx="0" ky="0" algn="bl" rotWithShape="0" blurRad="76200" dist="25400" dir="5400000">
               <a:srgbClr val="000000">
-                <a:alpha val="35000"/>
+                <a:alpha val="12000"/>
               </a:srgbClr>
             </a:outerShdw>
           </a:effectLst>
@@ -6228,7 +5880,7 @@
             <a:r>
               <a:rPr lang="en-US" sz="1400" dirty="0">
                 <a:solidFill>
-                  <a:srgbClr val="E6EDF3"/>
+                  <a:srgbClr val="1F2937"/>
                 </a:solidFill>
                 <a:latin typeface="Calibri" pitchFamily="34" charset="0"/>
                 <a:ea typeface="Calibri" pitchFamily="34" charset="-122"/>
@@ -6249,7 +5901,7 @@
             <a:r>
               <a:rPr lang="en-US" sz="1400" dirty="0">
                 <a:solidFill>
-                  <a:srgbClr val="E6EDF3"/>
+                  <a:srgbClr val="1F2937"/>
                 </a:solidFill>
                 <a:latin typeface="Calibri" pitchFamily="34" charset="0"/>
                 <a:ea typeface="Calibri" pitchFamily="34" charset="-122"/>
@@ -6288,7 +5940,7 @@
             <a:r>
               <a:rPr lang="en-US" sz="900" dirty="0">
                 <a:solidFill>
-                  <a:srgbClr val="94A3B8"/>
+                  <a:srgbClr val="64748B"/>
                 </a:solidFill>
                 <a:latin typeface="Calibri" pitchFamily="34" charset="0"/>
                 <a:ea typeface="Calibri" pitchFamily="34" charset="-122"/>
@@ -6300,38 +5952,9 @@
           </a:p>
         </p:txBody>
       </p:sp>
-      <p:sp>
-        <p:nvSpPr>
-          <p:cNvPr id="8" name="Shape 5"/>
-          <p:cNvSpPr/>
-          <p:nvPr/>
-        </p:nvSpPr>
-        <p:spPr>
-          <a:xfrm>
-            <a:off x="7772400" y="4590288"/>
-            <a:ext cx="969264" cy="475488"/>
-          </a:xfrm>
-          <a:prstGeom prst="roundRect">
-            <a:avLst>
-              <a:gd name="adj" fmla="val 11538"/>
-            </a:avLst>
-          </a:prstGeom>
-          <a:solidFill>
-            <a:srgbClr val="FFFFFF"/>
-          </a:solidFill>
-          <a:ln/>
-          <a:effectLst>
-            <a:outerShdw sx="100000" sy="100000" kx="0" ky="0" algn="bl" rotWithShape="0" blurRad="101600" dist="38100" dir="5400000">
-              <a:srgbClr val="000000">
-                <a:alpha val="35000"/>
-              </a:srgbClr>
-            </a:outerShdw>
-          </a:effectLst>
-        </p:spPr>
-      </p:sp>
       <p:pic>
         <p:nvPicPr>
-          <p:cNvPr id="9" name="Image 1" descr="/Users/pop7/Library/CloudStorage/OneDrive-MonsterConnectCo.,Ltd/Lecture/KOSEN69 - software-security/slides/pptx/assets/logo-small.png">    </p:cNvPr>
+          <p:cNvPr id="8" name="Image 1" descr="/Users/pop7/Library/CloudStorage/OneDrive-MonsterConnectCo.,Ltd/Lecture/KOSEN69 - software-security/slides/pptx/assets/logo-small.png">    </p:cNvPr>
           <p:cNvPicPr>
             <a:picLocks noChangeAspect="1"/>
           </p:cNvPicPr>
@@ -6345,7 +5968,7 @@
         </p:blipFill>
         <p:spPr>
           <a:xfrm>
-            <a:off x="7872984" y="4681728"/>
+            <a:off x="7882128" y="4700016"/>
             <a:ext cx="768096" cy="356616"/>
           </a:xfrm>
           <a:prstGeom prst="rect">

--- a/slides/pptx/week13.pptx
+++ b/slides/pptx/week13.pptx
@@ -514,7 +514,7 @@
           <a:p>
             <a:r>
               <a:rPr lang="en-US" dirty="0"/>
-              <a:t/>
+              <a:t>Hook: most cloud breaches aren't clever zero-days — they're a public S3 bucket or a `*:*` IAM policy. Today we hunt and fix those misconfigs. ~2 min.</a:t>
             </a:r>
             <a:endParaRPr lang="en-US" dirty="0"/>
           </a:p>
@@ -602,7 +602,7 @@
           <a:p>
             <a:r>
               <a:rPr lang="en-US" dirty="0"/>
-              <a:t/>
+              <a:t>Explain before lab. Find AND fix = the flag (defending is the point). Q6 of the quiz asks for one misconfig they fixed + the principle it violated. ~3 min.</a:t>
             </a:r>
             <a:endParaRPr lang="en-US" dirty="0"/>
           </a:p>
@@ -690,7 +690,7 @@
           <a:p>
             <a:r>
               <a:rPr lang="en-US" dirty="0"/>
-              <a:t/>
+              <a:t>Before/after artifacts + the trivy delta prove the fix. AI-resilient tasks count.</a:t>
             </a:r>
             <a:endParaRPr lang="en-US" dirty="0"/>
           </a:p>
@@ -778,7 +778,7 @@
           <a:p>
             <a:r>
               <a:rPr lang="en-US" dirty="0"/>
-              <a:t/>
+              <a:t>Recap. Cold-call: "what does a `*:*` IAM policy cost you if the key leaks?" (everything — full blast radius). "Scan in CI" sets up W15. ~2 min.</a:t>
             </a:r>
             <a:endParaRPr lang="en-US" dirty="0"/>
           </a:p>
@@ -866,7 +866,7 @@
           <a:p>
             <a:r>
               <a:rPr lang="en-US" dirty="0"/>
-              <a:t/>
+              <a:t>Cliffhanger: "Next week — the newest attack surface: make an AI assistant ignore its rules and leak secrets, with nothing but text."</a:t>
             </a:r>
             <a:endParaRPr lang="en-US" dirty="0"/>
           </a:p>
@@ -954,7 +954,7 @@
           <a:p>
             <a:r>
               <a:rPr lang="en-US" dirty="0"/>
-              <a:t/>
+              <a:t>Roadmap, 1 min. Theme: the cloud is secure; your CONFIGURATION usually isn't. Lab = find + fix misconfigurations, each one a flag.</a:t>
             </a:r>
             <a:endParaRPr lang="en-US" dirty="0"/>
           </a:p>
@@ -1042,7 +1042,7 @@
           <a:p>
             <a:r>
               <a:rPr lang="en-US" dirty="0"/>
-              <a:t/>
+              <a:t>1-min bridge. Misconfiguration jumped to A02 in 2025 — it's not a footnote, it's the second most critical web risk. ~2 min.</a:t>
             </a:r>
             <a:endParaRPr lang="en-US" dirty="0"/>
           </a:p>
@@ -1130,7 +1130,7 @@
           <a:p>
             <a:r>
               <a:rPr lang="en-US" dirty="0"/>
-              <a:t/>
+              <a:t>The mental model students most misunderstand: AWS secures the hardware/hypervisor; YOU secure your buckets, IAM, security groups. Almost every headline cloud breach is the customer's config, not the provider. ~4 min.</a:t>
             </a:r>
             <a:endParaRPr lang="en-US" dirty="0"/>
           </a:p>
@@ -1218,7 +1218,7 @@
           <a:p>
             <a:r>
               <a:rPr lang="en-US" dirty="0"/>
-              <a:t/>
+              <a:t>The worked example — this `*:*` policy is the Misconfig Hunt round 1 and the quiz. If a credential with this leaks, the attacker owns everything. Ask the class to rewrite it as read-only on one bucket. Least privilege = smallest possible blast radius. ~6 min.</a:t>
             </a:r>
             <a:endParaRPr lang="en-US" dirty="0"/>
           </a:p>
@@ -1306,7 +1306,7 @@
           <a:p>
             <a:r>
               <a:rPr lang="en-US" dirty="0"/>
-              <a:t/>
+              <a:t>Connect to W2 (Gitleaks) and W12. A secret baked into an image layer is in every copy of that image forever — `docker history` reveals it. Fix = inject at runtime from a vault + rotate. ~4 min.</a:t>
             </a:r>
             <a:endParaRPr lang="en-US" dirty="0"/>
           </a:p>
@@ -1394,7 +1394,7 @@
           <a:p>
             <a:r>
               <a:rPr lang="en-US" dirty="0"/>
-              <a:t/>
+              <a:t>The classic trio behind most breaches. `0.0.0.0/0` on a DB port = the internet can reach your database. Default creds = free entry. Principle: deny by default, open deliberately (echoes W6 access control). ~4 min.</a:t>
             </a:r>
             <a:endParaRPr lang="en-US" dirty="0"/>
           </a:p>
@@ -1482,7 +1482,7 @@
           <a:p>
             <a:r>
               <a:rPr lang="en-US" dirty="0"/>
-              <a:t/>
+              <a:t>Hands-on — this is the lab's insecure→hardened Dockerfile. `trivy config` finds the misconfig (root user, latest tag); `trivy image` finds CVEs in the base. Drop root + distroless = container escape gives far less. Re-scan to prove improvement. ~5 min.</a:t>
             </a:r>
             <a:endParaRPr lang="en-US" dirty="0"/>
           </a:p>
@@ -1570,7 +1570,7 @@
           <a:p>
             <a:r>
               <a:rPr lang="en-US" dirty="0"/>
-              <a:t/>
+              <a:t>Awareness only (K8s is its own course). Key takeaways: a privileged pod ≈ host root; mounted service-account tokens are a lateral-movement prize. Keep it brief. ~3 min.</a:t>
             </a:r>
             <a:endParaRPr lang="en-US" dirty="0"/>
           </a:p>
@@ -2834,11 +2834,11 @@
         <p:spPr>
           <a:xfrm>
             <a:off x="457200" y="1325880"/>
-            <a:ext cx="8229600" cy="1207008"/>
+            <a:ext cx="8229600" cy="1517904"/>
           </a:xfrm>
           <a:prstGeom prst="roundRect">
             <a:avLst>
-              <a:gd name="adj" fmla="val 6061"/>
+              <a:gd name="adj" fmla="val 4819"/>
             </a:avLst>
           </a:prstGeom>
           <a:solidFill>
@@ -2863,7 +2863,7 @@
         <p:spPr>
           <a:xfrm>
             <a:off x="731520" y="1435608"/>
-            <a:ext cx="7680960" cy="987552"/>
+            <a:ext cx="7680960" cy="1298448"/>
           </a:xfrm>
           <a:prstGeom prst="rect">
             <a:avLst/>
@@ -2934,6 +2934,27 @@
                 <a:cs typeface="Calibri" pitchFamily="34" charset="-120"/>
               </a:rPr>
               <a:t>Note on secrets remediation</a:t>
+            </a:r>
+            <a:endParaRPr lang="en-US" sz="1400" dirty="0"/>
+          </a:p>
+          <a:p>
+            <a:pPr marL="342900" indent="-342900">
+              <a:spcAft>
+                <a:spcPts val="600"/>
+              </a:spcAft>
+              <a:buSzPct val="100000"/>
+              <a:buChar char="•"/>
+            </a:pPr>
+            <a:r>
+              <a:rPr lang="en-US" sz="1400" dirty="0">
+                <a:solidFill>
+                  <a:srgbClr val="1F2937"/>
+                </a:solidFill>
+                <a:latin typeface="Calibri" pitchFamily="34" charset="0"/>
+                <a:ea typeface="Calibri" pitchFamily="34" charset="-122"/>
+                <a:cs typeface="Calibri" pitchFamily="34" charset="-120"/>
+              </a:rPr>
+              <a:t>+ Audit the AI / EiPE / Prompt Problem (see worksheet)</a:t>
             </a:r>
             <a:endParaRPr lang="en-US" sz="1400" dirty="0"/>
           </a:p>

--- a/slides/pptx/week13.pptx
+++ b/slides/pptx/week13.pptx
@@ -2834,6 +2834,67 @@
         <p:spPr>
           <a:xfrm>
             <a:off x="457200" y="1325880"/>
+            <a:ext cx="8229600" cy="822960"/>
+          </a:xfrm>
+          <a:prstGeom prst="roundRect">
+            <a:avLst>
+              <a:gd name="adj" fmla="val 8889"/>
+            </a:avLst>
+          </a:prstGeom>
+          <a:solidFill>
+            <a:srgbClr val="E8EDF3"/>
+          </a:solidFill>
+          <a:ln/>
+        </p:spPr>
+      </p:sp>
+      <p:sp>
+        <p:nvSpPr>
+          <p:cNvPr id="6" name="Text 3"/>
+          <p:cNvSpPr/>
+          <p:nvPr/>
+        </p:nvSpPr>
+        <p:spPr>
+          <a:xfrm>
+            <a:off x="731520" y="1325880"/>
+            <a:ext cx="7680960" cy="822960"/>
+          </a:xfrm>
+          <a:prstGeom prst="rect">
+            <a:avLst/>
+          </a:prstGeom>
+          <a:noFill/>
+          <a:ln/>
+        </p:spPr>
+        <p:txBody>
+          <a:bodyPr wrap="square" lIns="0" tIns="0" rIns="0" bIns="0" rtlCol="0" anchor="ctr"/>
+          <a:lstStyle/>
+          <a:p>
+            <a:pPr indent="0" marL="0">
+              <a:buNone/>
+            </a:pPr>
+            <a:r>
+              <a:rPr lang="en-US" sz="1400" i="1" dirty="0">
+                <a:solidFill>
+                  <a:srgbClr val="E35205"/>
+                </a:solidFill>
+                <a:latin typeface="Calibri" pitchFamily="34" charset="0"/>
+                <a:ea typeface="Calibri" pitchFamily="34" charset="-122"/>
+                <a:cs typeface="Calibri" pitchFamily="34" charset="-120"/>
+              </a:rPr>
+              <a:t>📋 Worksheet 13 — labs/week13-cloud-container/worksheet.md (Part 3) · kickoff: bash scan.sh (trivy config over Dockerfiles + IAM JSON)</a:t>
+            </a:r>
+            <a:endParaRPr lang="en-US" sz="1400" dirty="0"/>
+          </a:p>
+        </p:txBody>
+      </p:sp>
+      <p:sp>
+        <p:nvSpPr>
+          <p:cNvPr id="7" name="Shape 4"/>
+          <p:cNvSpPr/>
+          <p:nvPr/>
+        </p:nvSpPr>
+        <p:spPr>
+          <a:xfrm>
+            <a:off x="457200" y="2313432"/>
             <a:ext cx="8229600" cy="1517904"/>
           </a:xfrm>
           <a:prstGeom prst="roundRect">
@@ -2856,13 +2917,13 @@
       </p:sp>
       <p:sp>
         <p:nvSpPr>
-          <p:cNvPr id="6" name="Text 3"/>
-          <p:cNvSpPr/>
-          <p:nvPr/>
-        </p:nvSpPr>
-        <p:spPr>
-          <a:xfrm>
-            <a:off x="731520" y="1435608"/>
+          <p:cNvPr id="8" name="Text 5"/>
+          <p:cNvSpPr/>
+          <p:nvPr/>
+        </p:nvSpPr>
+        <p:spPr>
+          <a:xfrm>
+            <a:off x="731520" y="2423160"/>
             <a:ext cx="7680960" cy="1298448"/>
           </a:xfrm>
           <a:prstGeom prst="rect">
@@ -2962,7 +3023,7 @@
       </p:sp>
       <p:sp>
         <p:nvSpPr>
-          <p:cNvPr id="7" name="Text 4"/>
+          <p:cNvPr id="9" name="Text 6"/>
           <p:cNvSpPr/>
           <p:nvPr/>
         </p:nvSpPr>
@@ -3001,7 +3062,7 @@
       </p:sp>
       <p:pic>
         <p:nvPicPr>
-          <p:cNvPr id="8" name="Image 1" descr="/Users/pop7/Library/CloudStorage/OneDrive-MonsterConnectCo.,Ltd/Lecture/KOSEN69 - software-security/slides/pptx/assets/logo-small.png">    </p:cNvPr>
+          <p:cNvPr id="10" name="Image 1" descr="/Users/pop7/Library/CloudStorage/OneDrive-MonsterConnectCo.,Ltd/Lecture/KOSEN69 - software-security/slides/pptx/assets/logo-small.png">    </p:cNvPr>
           <p:cNvPicPr>
             <a:picLocks noChangeAspect="1"/>
           </p:cNvPicPr>
